--- a/image-path/image-path.pptx
+++ b/image-path/image-path.pptx
@@ -3681,7 +3681,7 @@
         <p:spPr>
           <a:xfrm>
             <a:off x="548640" y="1371600"/>
-            <a:ext cx="11091672" cy="312039"/>
+            <a:ext cx="11091672" cy="286897"/>
           </a:xfrm>
           <a:prstGeom prst="rect">
             <a:avLst/>
@@ -3727,8 +3727,8 @@
         </p:nvSpPr>
         <p:spPr>
           <a:xfrm>
-            <a:off x="548640" y="1829943"/>
-            <a:ext cx="11091672" cy="312039"/>
+            <a:off x="548640" y="1793013"/>
+            <a:ext cx="11091672" cy="286897"/>
           </a:xfrm>
           <a:prstGeom prst="rect">
             <a:avLst/>
@@ -3774,8 +3774,8 @@
         </p:nvSpPr>
         <p:spPr>
           <a:xfrm>
-            <a:off x="548640" y="2288286"/>
-            <a:ext cx="11091672" cy="312039"/>
+            <a:off x="548640" y="2214426"/>
+            <a:ext cx="11091672" cy="286897"/>
           </a:xfrm>
           <a:prstGeom prst="rect">
             <a:avLst/>
@@ -3821,8 +3821,8 @@
         </p:nvSpPr>
         <p:spPr>
           <a:xfrm>
-            <a:off x="548640" y="2746629"/>
-            <a:ext cx="11091672" cy="312039"/>
+            <a:off x="548640" y="2635839"/>
+            <a:ext cx="11091672" cy="286897"/>
           </a:xfrm>
           <a:prstGeom prst="rect">
             <a:avLst/>
@@ -3868,8 +3868,8 @@
         </p:nvSpPr>
         <p:spPr>
           <a:xfrm>
-            <a:off x="548640" y="3204972"/>
-            <a:ext cx="11091672" cy="312039"/>
+            <a:off x="548640" y="3057252"/>
+            <a:ext cx="11091672" cy="286897"/>
           </a:xfrm>
           <a:prstGeom prst="rect">
             <a:avLst/>
@@ -3915,8 +3915,8 @@
         </p:nvSpPr>
         <p:spPr>
           <a:xfrm>
-            <a:off x="548640" y="3663315"/>
-            <a:ext cx="11091672" cy="312039"/>
+            <a:off x="548640" y="3478666"/>
+            <a:ext cx="11091672" cy="286897"/>
           </a:xfrm>
           <a:prstGeom prst="rect">
             <a:avLst/>
@@ -3962,8 +3962,8 @@
         </p:nvSpPr>
         <p:spPr>
           <a:xfrm>
-            <a:off x="548640" y="4121658"/>
-            <a:ext cx="11091672" cy="312039"/>
+            <a:off x="548640" y="3900079"/>
+            <a:ext cx="11091672" cy="286897"/>
           </a:xfrm>
           <a:prstGeom prst="rect">
             <a:avLst/>
@@ -3995,7 +3995,7 @@
                 <a:ea typeface="Malgun Gothic" pitchFamily="34" charset="-122"/>
                 <a:cs typeface="Malgun Gothic" pitchFamily="34" charset="-120"/>
               </a:rPr>
-              <a:t>층들이 잔차 F(x)만</a:t>
+              <a:t>↓ ↘ 지름길 x</a:t>
             </a:r>
             <a:endParaRPr lang="en-US" sz="1350" dirty="0"/>
           </a:p>
@@ -4009,8 +4009,8 @@
         </p:nvSpPr>
         <p:spPr>
           <a:xfrm>
-            <a:off x="548640" y="4580001"/>
-            <a:ext cx="11091672" cy="312039"/>
+            <a:off x="548640" y="4321492"/>
+            <a:ext cx="11091672" cy="286897"/>
           </a:xfrm>
           <a:prstGeom prst="rect">
             <a:avLst/>
@@ -4042,6 +4042,100 @@
                 <a:ea typeface="Malgun Gothic" pitchFamily="34" charset="-122"/>
                 <a:cs typeface="Malgun Gothic" pitchFamily="34" charset="-120"/>
               </a:rPr>
+              <a:t>층들이 잔차 F(x)만</a:t>
+            </a:r>
+            <a:endParaRPr lang="en-US" sz="1350" dirty="0"/>
+          </a:p>
+        </p:txBody>
+      </p:sp>
+      <p:sp>
+        <p:nvSpPr>
+          <p:cNvPr id="12" name="Text 10"/>
+          <p:cNvSpPr/>
+          <p:nvPr/>
+        </p:nvSpPr>
+        <p:spPr>
+          <a:xfrm>
+            <a:off x="548640" y="4742905"/>
+            <a:ext cx="11091672" cy="286897"/>
+          </a:xfrm>
+          <a:prstGeom prst="rect">
+            <a:avLst/>
+          </a:prstGeom>
+          <a:noFill/>
+          <a:ln/>
+        </p:spPr>
+        <p:txBody>
+          <a:bodyPr wrap="square" rtlCol="0" anchor="t">
+            <a:normAutofit/>
+          </a:bodyPr>
+          <a:lstStyle/>
+          <a:p>
+            <a:pPr indent="0" marL="0">
+              <a:lnSpc>
+                <a:spcPct val="108000"/>
+              </a:lnSpc>
+              <a:spcAft>
+                <a:spcPts val="200"/>
+              </a:spcAft>
+              <a:buNone/>
+            </a:pPr>
+            <a:r>
+              <a:rPr lang="en-US" sz="1350" dirty="0">
+                <a:solidFill>
+                  <a:srgbClr val="6B6357"/>
+                </a:solidFill>
+                <a:latin typeface="Malgun Gothic" pitchFamily="34" charset="0"/>
+                <a:ea typeface="Malgun Gothic" pitchFamily="34" charset="-122"/>
+                <a:cs typeface="Malgun Gothic" pitchFamily="34" charset="-120"/>
+              </a:rPr>
+              <a:t>↓ +</a:t>
+            </a:r>
+            <a:endParaRPr lang="en-US" sz="1350" dirty="0"/>
+          </a:p>
+        </p:txBody>
+      </p:sp>
+      <p:sp>
+        <p:nvSpPr>
+          <p:cNvPr id="13" name="Text 11"/>
+          <p:cNvSpPr/>
+          <p:nvPr/>
+        </p:nvSpPr>
+        <p:spPr>
+          <a:xfrm>
+            <a:off x="548640" y="5164318"/>
+            <a:ext cx="11091672" cy="286897"/>
+          </a:xfrm>
+          <a:prstGeom prst="rect">
+            <a:avLst/>
+          </a:prstGeom>
+          <a:noFill/>
+          <a:ln/>
+        </p:spPr>
+        <p:txBody>
+          <a:bodyPr wrap="square" rtlCol="0" anchor="t">
+            <a:normAutofit/>
+          </a:bodyPr>
+          <a:lstStyle/>
+          <a:p>
+            <a:pPr indent="0" marL="0">
+              <a:lnSpc>
+                <a:spcPct val="108000"/>
+              </a:lnSpc>
+              <a:spcAft>
+                <a:spcPts val="200"/>
+              </a:spcAft>
+              <a:buNone/>
+            </a:pPr>
+            <a:r>
+              <a:rPr lang="en-US" sz="1350" dirty="0">
+                <a:solidFill>
+                  <a:srgbClr val="6B6357"/>
+                </a:solidFill>
+                <a:latin typeface="Malgun Gothic" pitchFamily="34" charset="0"/>
+                <a:ea typeface="Malgun Gothic" pitchFamily="34" charset="-122"/>
+                <a:cs typeface="Malgun Gothic" pitchFamily="34" charset="-120"/>
+              </a:rPr>
               <a:t>출력 F(x) + x</a:t>
             </a:r>
             <a:endParaRPr lang="en-US" sz="1350" dirty="0"/>
@@ -4050,18 +4144,18 @@
       </p:sp>
       <p:sp>
         <p:nvSpPr>
-          <p:cNvPr id="12" name="Shape 10"/>
-          <p:cNvSpPr/>
-          <p:nvPr/>
-        </p:nvSpPr>
-        <p:spPr>
-          <a:xfrm>
-            <a:off x="548640" y="5038344"/>
-            <a:ext cx="11091672" cy="1005840"/>
+          <p:cNvPr id="14" name="Shape 12"/>
+          <p:cNvSpPr/>
+          <p:nvPr/>
+        </p:nvSpPr>
+        <p:spPr>
+          <a:xfrm>
+            <a:off x="548640" y="5585731"/>
+            <a:ext cx="11091672" cy="924797"/>
           </a:xfrm>
           <a:prstGeom prst="roundRect">
             <a:avLst>
-              <a:gd name="adj" fmla="val 8182"/>
+              <a:gd name="adj" fmla="val 8899"/>
             </a:avLst>
           </a:prstGeom>
           <a:solidFill>
@@ -4077,14 +4171,14 @@
       </p:sp>
       <p:sp>
         <p:nvSpPr>
-          <p:cNvPr id="13" name="Text 11"/>
-          <p:cNvSpPr/>
-          <p:nvPr/>
-        </p:nvSpPr>
-        <p:spPr>
-          <a:xfrm>
-            <a:off x="822960" y="5038344"/>
-            <a:ext cx="10543032" cy="1005840"/>
+          <p:cNvPr id="15" name="Text 13"/>
+          <p:cNvSpPr/>
+          <p:nvPr/>
+        </p:nvSpPr>
+        <p:spPr>
+          <a:xfrm>
+            <a:off x="822960" y="5585731"/>
+            <a:ext cx="10543032" cy="924797"/>
           </a:xfrm>
           <a:prstGeom prst="rect">
             <a:avLst/>
